--- a/4_Reports/Generate_Result_v2.pptx
+++ b/4_Reports/Generate_Result_v2.pptx
@@ -3949,7 +3949,7 @@
         <p:spPr>
           <a:xfrm>
             <a:off x="3608070" y="961390"/>
-            <a:ext cx="6705600" cy="3138170"/>
+            <a:ext cx="6705600" cy="3415030"/>
           </a:xfrm>
           <a:prstGeom prst="rect">
             <a:avLst/>
@@ -4143,6 +4143,9 @@
               <a:t>高度一致</a:t>
             </a:r>
             <a:endParaRPr lang="zh-CN" altLang="en-US"/>
+          </a:p>
+          <a:p>
+            <a:endParaRPr lang="en-US" altLang="zh-CN"/>
           </a:p>
           <a:p>
             <a:r>
